--- a/data/outputs/v2/Biology/SS1.2_Chemicals_of_Life/quiz/Biology_G10_SS1.2_Chemicals_of_Life_L1_QuickCheck.pptx
+++ b/data/outputs/v2/Biology/SS1.2_Chemicals_of_Life/quiz/Biology_G10_SS1.2_Chemicals_of_Life_L1_QuickCheck.pptx
@@ -1698,7 +1698,7 @@
                 <a:ea typeface="Arial" pitchFamily="34" charset="-122"/>
                 <a:cs typeface="Arial" pitchFamily="34" charset="-120"/>
               </a:rPr>
-              <a:t>Lesson 1: Predict: What Is Food Really Made Of?</a:t>
+              <a:t>Lesson 1: The Blood Glucose Puzzle: Why Does Glucose Rise and Fall After Eating Ugali?</a:t>
             </a:r>
             <a:endParaRPr lang="en-US" sz="2000" dirty="0"/>
           </a:p>
@@ -1982,7 +1982,7 @@
                 <a:ea typeface="Arial" pitchFamily="34" charset="-122"/>
                 <a:cs typeface="Arial" pitchFamily="34" charset="-120"/>
               </a:rPr>
-              <a:t>Use after: Predict phase</a:t>
+              <a:t>Use after: Observe phase</a:t>
             </a:r>
             <a:endParaRPr lang="en-US" sz="1100" dirty="0"/>
           </a:p>
@@ -2013,7 +2013,7 @@
               <a:buNone/>
             </a:pPr>
             <a:r>
-              <a:rPr lang="en-US" sz="1600" b="1" dirty="0">
+              <a:rPr lang="en-US" sz="1800" b="1" dirty="0">
                 <a:solidFill>
                   <a:srgbClr val="FFFFFF"/>
                 </a:solidFill>
@@ -2021,9 +2021,9 @@
                 <a:ea typeface="Arial" pitchFamily="34" charset="-122"/>
                 <a:cs typeface="Arial" pitchFamily="34" charset="-120"/>
               </a:rPr>
-              <a:t>Two children live in the same village near Kisumu and eat about the same amount of food each day. Child A has a swollen belly, thin limbs and reddish hair. Child B looks healthy and energetic. Which of these is something you NOTICE (an observation) rather than a guess?</a:t>
-            </a:r>
-            <a:endParaRPr lang="en-US" sz="1600" dirty="0"/>
+              <a:t>Wanjiru fasted, then ate ugali, sukuma wiki and beans. Her blood glucose was 4.5 mmol/L at 0 min and reached its highest value of 8.0 mmol/L at 60 min. By how much did her blood glucose rise from 0 to 60 min?</a:t>
+            </a:r>
+            <a:endParaRPr lang="en-US" sz="1800" dirty="0"/>
           </a:p>
         </p:txBody>
       </p:sp>
@@ -2121,7 +2121,7 @@
                 <a:ea typeface="Arial" pitchFamily="34" charset="-122"/>
                 <a:cs typeface="Arial" pitchFamily="34" charset="-120"/>
               </a:rPr>
-              <a:t>Child B has more money than Child A's family.</a:t>
+              <a:t>8.0 mmol/L</a:t>
             </a:r>
             <a:endParaRPr lang="en-US" sz="1700" dirty="0"/>
           </a:p>
@@ -2221,7 +2221,7 @@
                 <a:ea typeface="Arial" pitchFamily="34" charset="-122"/>
                 <a:cs typeface="Arial" pitchFamily="34" charset="-120"/>
               </a:rPr>
-              <a:t>Child A was born with a disease.</a:t>
+              <a:t>4.5 mmol/L</a:t>
             </a:r>
             <a:endParaRPr lang="en-US" sz="1700" dirty="0"/>
           </a:p>
@@ -2321,7 +2321,7 @@
                 <a:ea typeface="Arial" pitchFamily="34" charset="-122"/>
                 <a:cs typeface="Arial" pitchFamily="34" charset="-120"/>
               </a:rPr>
-              <a:t>Child A is sick because something is missing from the food.</a:t>
+              <a:t>3.5 mmol/L</a:t>
             </a:r>
             <a:endParaRPr lang="en-US" sz="1700" dirty="0"/>
           </a:p>
@@ -2421,7 +2421,7 @@
                 <a:ea typeface="Arial" pitchFamily="34" charset="-122"/>
                 <a:cs typeface="Arial" pitchFamily="34" charset="-120"/>
               </a:rPr>
-              <a:t>Child A has a swollen belly and thin limbs.</a:t>
+              <a:t>12.5 mmol/L</a:t>
             </a:r>
             <a:endParaRPr lang="en-US" sz="1700" dirty="0"/>
           </a:p>
@@ -2592,7 +2592,7 @@
                 <a:ea typeface="Arial" pitchFamily="34" charset="-122"/>
                 <a:cs typeface="Arial" pitchFamily="34" charset="-120"/>
               </a:rPr>
-              <a:t>Use after: Predict phase</a:t>
+              <a:t>Use after: Observe phase</a:t>
             </a:r>
             <a:endParaRPr lang="en-US" sz="1100" dirty="0"/>
           </a:p>
@@ -2631,7 +2631,7 @@
                 <a:ea typeface="Arial" pitchFamily="34" charset="-122"/>
                 <a:cs typeface="Arial" pitchFamily="34" charset="-120"/>
               </a:rPr>
-              <a:t>Child A eats ugali (maize starch) as the main meal every day. Child B eats githeri (maize and beans) regularly. Which statement matches the information given about the two children?</a:t>
+              <a:t>Wanjiru's blood glucose started at 4.5 mmol/L and rose by 3.5 mmol/L to a peak of 8.0 mmol/L. About what percentage above her starting level was the peak?</a:t>
             </a:r>
             <a:endParaRPr lang="en-US" sz="2000" dirty="0"/>
           </a:p>
@@ -2723,7 +2723,7 @@
               <a:buNone/>
             </a:pPr>
             <a:r>
-              <a:rPr lang="en-US" sz="1500" dirty="0">
+              <a:rPr lang="en-US" sz="1700" dirty="0">
                 <a:solidFill>
                   <a:srgbClr val="FFFFFF"/>
                 </a:solidFill>
@@ -2731,9 +2731,9 @@
                 <a:ea typeface="Arial" pitchFamily="34" charset="-122"/>
                 <a:cs typeface="Arial" pitchFamily="34" charset="-120"/>
               </a:rPr>
-              <a:t>Both children eat only ugali every day.</a:t>
-            </a:r>
-            <a:endParaRPr lang="en-US" sz="1500" dirty="0"/>
+              <a:t>About 56%</a:t>
+            </a:r>
+            <a:endParaRPr lang="en-US" sz="1700" dirty="0"/>
           </a:p>
         </p:txBody>
       </p:sp>
@@ -2823,7 +2823,7 @@
               <a:buNone/>
             </a:pPr>
             <a:r>
-              <a:rPr lang="en-US" sz="1500" dirty="0">
+              <a:rPr lang="en-US" sz="1700" dirty="0">
                 <a:solidFill>
                   <a:srgbClr val="FFFFFF"/>
                 </a:solidFill>
@@ -2831,9 +2831,9 @@
                 <a:ea typeface="Arial" pitchFamily="34" charset="-122"/>
                 <a:cs typeface="Arial" pitchFamily="34" charset="-120"/>
               </a:rPr>
-              <a:t>The children live in different parts of Kenya.</a:t>
-            </a:r>
-            <a:endParaRPr lang="en-US" sz="1500" dirty="0"/>
+              <a:t>About 3.5%</a:t>
+            </a:r>
+            <a:endParaRPr lang="en-US" sz="1700" dirty="0"/>
           </a:p>
         </p:txBody>
       </p:sp>
@@ -2923,7 +2923,7 @@
               <a:buNone/>
             </a:pPr>
             <a:r>
-              <a:rPr lang="en-US" sz="1500" dirty="0">
+              <a:rPr lang="en-US" sz="1700" dirty="0">
                 <a:solidFill>
                   <a:srgbClr val="FFFFFF"/>
                 </a:solidFill>
@@ -2931,9 +2931,9 @@
                 <a:ea typeface="Arial" pitchFamily="34" charset="-122"/>
                 <a:cs typeface="Arial" pitchFamily="34" charset="-120"/>
               </a:rPr>
-              <a:t>Both children eat about the same amount of food and live in the same village near Kisumu.</a:t>
-            </a:r>
-            <a:endParaRPr lang="en-US" sz="1500" dirty="0"/>
+              <a:t>About 78%</a:t>
+            </a:r>
+            <a:endParaRPr lang="en-US" sz="1700" dirty="0"/>
           </a:p>
         </p:txBody>
       </p:sp>
@@ -3023,7 +3023,7 @@
               <a:buNone/>
             </a:pPr>
             <a:r>
-              <a:rPr lang="en-US" sz="1500" dirty="0">
+              <a:rPr lang="en-US" sz="1700" dirty="0">
                 <a:solidFill>
                   <a:srgbClr val="FFFFFF"/>
                 </a:solidFill>
@@ -3031,9 +3031,9 @@
                 <a:ea typeface="Arial" pitchFamily="34" charset="-122"/>
                 <a:cs typeface="Arial" pitchFamily="34" charset="-120"/>
               </a:rPr>
-              <a:t>Child B eats much more food each day than Child A.</a:t>
-            </a:r>
-            <a:endParaRPr lang="en-US" sz="1500" dirty="0"/>
+              <a:t>About 44%</a:t>
+            </a:r>
+            <a:endParaRPr lang="en-US" sz="1700" dirty="0"/>
           </a:p>
         </p:txBody>
       </p:sp>
@@ -3241,7 +3241,7 @@
                 <a:ea typeface="Arial" pitchFamily="34" charset="-122"/>
                 <a:cs typeface="Arial" pitchFamily="34" charset="-120"/>
               </a:rPr>
-              <a:t>A group is filling in a two-column table about the two Kisumu children: 'What the evidence shows us' and 'What we still need to find out'. Which entry belongs in the SECOND column?</a:t>
+              <a:t>Wanjiru's blood glucose rose by 3.5 mmol/L between 0 and 60 min (4.5 to 8.0 mmol/L). It then fell by 3.5 mmol/L between 60 and 180 min (8.0 back to 4.5 mmol/L). What do these numbers show?</a:t>
             </a:r>
             <a:endParaRPr lang="en-US" sz="2000" dirty="0"/>
           </a:p>
@@ -3333,7 +3333,7 @@
               <a:buNone/>
             </a:pPr>
             <a:r>
-              <a:rPr lang="en-US" sz="1700" dirty="0">
+              <a:rPr lang="en-US" sz="1500" dirty="0">
                 <a:solidFill>
                   <a:srgbClr val="FFFFFF"/>
                 </a:solidFill>
@@ -3341,9 +3341,9 @@
                 <a:ea typeface="Arial" pitchFamily="34" charset="-122"/>
                 <a:cs typeface="Arial" pitchFamily="34" charset="-120"/>
               </a:rPr>
-              <a:t>Which specific chemicals are different between ugali and githeri.</a:t>
-            </a:r>
-            <a:endParaRPr lang="en-US" sz="1700" dirty="0"/>
+              <a:t>The rise and fall cannot be compared because they have different start times.</a:t>
+            </a:r>
+            <a:endParaRPr lang="en-US" sz="1500" dirty="0"/>
           </a:p>
         </p:txBody>
       </p:sp>
@@ -3433,7 +3433,7 @@
               <a:buNone/>
             </a:pPr>
             <a:r>
-              <a:rPr lang="en-US" sz="1700" dirty="0">
+              <a:rPr lang="en-US" sz="1500" dirty="0">
                 <a:solidFill>
                   <a:srgbClr val="FFFFFF"/>
                 </a:solidFill>
@@ -3441,9 +3441,9 @@
                 <a:ea typeface="Arial" pitchFamily="34" charset="-122"/>
                 <a:cs typeface="Arial" pitchFamily="34" charset="-120"/>
               </a:rPr>
-              <a:t>Child B eats githeri and looks healthy and energetic.</a:t>
-            </a:r>
-            <a:endParaRPr lang="en-US" sz="1700" dirty="0"/>
+              <a:t>The rise was faster because the same 3.5 mmol/L change took 60 min going up but 120 min coming down.</a:t>
+            </a:r>
+            <a:endParaRPr lang="en-US" sz="1500" dirty="0"/>
           </a:p>
         </p:txBody>
       </p:sp>
@@ -3533,7 +3533,7 @@
               <a:buNone/>
             </a:pPr>
             <a:r>
-              <a:rPr lang="en-US" sz="1700" dirty="0">
+              <a:rPr lang="en-US" sz="1500" dirty="0">
                 <a:solidFill>
                   <a:srgbClr val="FFFFFF"/>
                 </a:solidFill>
@@ -3541,9 +3541,9 @@
                 <a:ea typeface="Arial" pitchFamily="34" charset="-122"/>
                 <a:cs typeface="Arial" pitchFamily="34" charset="-120"/>
               </a:rPr>
-              <a:t>Both children live in the same village near Kisumu.</a:t>
-            </a:r>
-            <a:endParaRPr lang="en-US" sz="1700" dirty="0"/>
+              <a:t>The fall was faster because glucose ended at a lower value than the peak.</a:t>
+            </a:r>
+            <a:endParaRPr lang="en-US" sz="1500" dirty="0"/>
           </a:p>
         </p:txBody>
       </p:sp>
@@ -3633,7 +3633,7 @@
               <a:buNone/>
             </a:pPr>
             <a:r>
-              <a:rPr lang="en-US" sz="1700" dirty="0">
+              <a:rPr lang="en-US" sz="1500" dirty="0">
                 <a:solidFill>
                   <a:srgbClr val="FFFFFF"/>
                 </a:solidFill>
@@ -3641,9 +3641,9 @@
                 <a:ea typeface="Arial" pitchFamily="34" charset="-122"/>
                 <a:cs typeface="Arial" pitchFamily="34" charset="-120"/>
               </a:rPr>
-              <a:t>Child A eats ugali every day and has a swollen belly.</a:t>
-            </a:r>
-            <a:endParaRPr lang="en-US" sz="1700" dirty="0"/>
+              <a:t>The rise and the fall were equally fast because both changes were 3.5 mmol/L.</a:t>
+            </a:r>
+            <a:endParaRPr lang="en-US" sz="1500" dirty="0"/>
           </a:p>
         </p:txBody>
       </p:sp>
@@ -3843,7 +3843,7 @@
               <a:buNone/>
             </a:pPr>
             <a:r>
-              <a:rPr lang="en-US" sz="2000" b="1" dirty="0">
+              <a:rPr lang="en-US" sz="1600" b="1" dirty="0">
                 <a:solidFill>
                   <a:srgbClr val="FFFFFF"/>
                 </a:solidFill>
@@ -3851,9 +3851,9 @@
                 <a:ea typeface="Arial" pitchFamily="34" charset="-122"/>
                 <a:cs typeface="Arial" pitchFamily="34" charset="-120"/>
               </a:rPr>
-              <a:t>Right now the class has only seen photographs and read a short card about the two children. Which is the best response to the question 'Why do the two children have such different bodies?'</a:t>
-            </a:r>
-            <a:endParaRPr lang="en-US" sz="2000" dirty="0"/>
+              <a:t>A meal card for Wanjiru's lunch lists: ugali about 70 g carbohydrate, beans about 20 g protein and 15 g carbohydrate, sukuma wiki about 3 g protein plus fibre, vitamins and minerals, cooking oil about 10 g fat. Which food in the meal contained the largest amount of carbohydrate?</a:t>
+            </a:r>
+            <a:endParaRPr lang="en-US" sz="1600" dirty="0"/>
           </a:p>
         </p:txBody>
       </p:sp>
@@ -3943,7 +3943,7 @@
               <a:buNone/>
             </a:pPr>
             <a:r>
-              <a:rPr lang="en-US" sz="1500" dirty="0">
+              <a:rPr lang="en-US" sz="1700" dirty="0">
                 <a:solidFill>
                   <a:srgbClr val="FFFFFF"/>
                 </a:solidFill>
@@ -3951,9 +3951,9 @@
                 <a:ea typeface="Arial" pitchFamily="34" charset="-122"/>
                 <a:cs typeface="Arial" pitchFamily="34" charset="-120"/>
               </a:rPr>
-              <a:t>We do not know yet. We need to find out what the two foods are made of before we can explain it.</a:t>
-            </a:r>
-            <a:endParaRPr lang="en-US" sz="1500" dirty="0"/>
+              <a:t>Sukuma wiki</a:t>
+            </a:r>
+            <a:endParaRPr lang="en-US" sz="1700" dirty="0"/>
           </a:p>
         </p:txBody>
       </p:sp>
@@ -4043,7 +4043,7 @@
               <a:buNone/>
             </a:pPr>
             <a:r>
-              <a:rPr lang="en-US" sz="1500" dirty="0">
+              <a:rPr lang="en-US" sz="1700" dirty="0">
                 <a:solidFill>
                   <a:srgbClr val="FFFFFF"/>
                 </a:solidFill>
@@ -4051,9 +4051,9 @@
                 <a:ea typeface="Arial" pitchFamily="34" charset="-122"/>
                 <a:cs typeface="Arial" pitchFamily="34" charset="-120"/>
               </a:rPr>
-              <a:t>The child with the swollen belly is just tired from playing too much.</a:t>
-            </a:r>
-            <a:endParaRPr lang="en-US" sz="1500" dirty="0"/>
+              <a:t>Cooking oil</a:t>
+            </a:r>
+            <a:endParaRPr lang="en-US" sz="1700" dirty="0"/>
           </a:p>
         </p:txBody>
       </p:sp>
@@ -4143,7 +4143,7 @@
               <a:buNone/>
             </a:pPr>
             <a:r>
-              <a:rPr lang="en-US" sz="1500" dirty="0">
+              <a:rPr lang="en-US" sz="1700" dirty="0">
                 <a:solidFill>
                   <a:srgbClr val="FFFFFF"/>
                 </a:solidFill>
@@ -4151,9 +4151,9 @@
                 <a:ea typeface="Arial" pitchFamily="34" charset="-122"/>
                 <a:cs typeface="Arial" pitchFamily="34" charset="-120"/>
               </a:rPr>
-              <a:t>Ugali is bad food and githeri is good food, so nothing more needs to be studied.</a:t>
-            </a:r>
-            <a:endParaRPr lang="en-US" sz="1500" dirty="0"/>
+              <a:t>Ugali</a:t>
+            </a:r>
+            <a:endParaRPr lang="en-US" sz="1700" dirty="0"/>
           </a:p>
         </p:txBody>
       </p:sp>
@@ -4243,7 +4243,7 @@
               <a:buNone/>
             </a:pPr>
             <a:r>
-              <a:rPr lang="en-US" sz="1500" dirty="0">
+              <a:rPr lang="en-US" sz="1700" dirty="0">
                 <a:solidFill>
                   <a:srgbClr val="FFFFFF"/>
                 </a:solidFill>
@@ -4251,9 +4251,9 @@
                 <a:ea typeface="Arial" pitchFamily="34" charset="-122"/>
                 <a:cs typeface="Arial" pitchFamily="34" charset="-120"/>
               </a:rPr>
-              <a:t>Child A is not eating enough food, and that is the only reason.</a:t>
-            </a:r>
-            <a:endParaRPr lang="en-US" sz="1500" dirty="0"/>
+              <a:t>Beans</a:t>
+            </a:r>
+            <a:endParaRPr lang="en-US" sz="1700" dirty="0"/>
           </a:p>
         </p:txBody>
       </p:sp>
@@ -4461,7 +4461,7 @@
                 <a:ea typeface="Arial" pitchFamily="34" charset="-122"/>
                 <a:cs typeface="Arial" pitchFamily="34" charset="-120"/>
               </a:rPr>
-              <a:t>In the Chemical Families Card Sort, groups match foods such as ugali, githeri, sukuma wiki, nyama choma, fish from Lake Victoria and mandazi to the chemical family each is richest in. Which of these lists names the six chemical families used in the card sort?</a:t>
+              <a:t>After looking at the graph of blood glucose rising to 8.0 mmol/L and then falling back to 4.5 mmol/L, a group is asked what causes the fall after the peak. Which statement is the most honest scientific position at this stage of the unit?</a:t>
             </a:r>
             <a:endParaRPr lang="en-US" sz="1800" dirty="0"/>
           </a:p>
@@ -4553,7 +4553,7 @@
               <a:buNone/>
             </a:pPr>
             <a:r>
-              <a:rPr lang="en-US" sz="1700" dirty="0">
+              <a:rPr lang="en-US" sz="1300" dirty="0">
                 <a:solidFill>
                   <a:srgbClr val="FFFFFF"/>
                 </a:solidFill>
@@ -4561,9 +4561,9 @@
                 <a:ea typeface="Arial" pitchFamily="34" charset="-122"/>
                 <a:cs typeface="Arial" pitchFamily="34" charset="-120"/>
               </a:rPr>
-              <a:t>Carbohydrates, proteins, lipids, vitamins, mineral salts, oxygen</a:t>
-            </a:r>
-            <a:endParaRPr lang="en-US" sz="1700" dirty="0"/>
+              <a:t>Glucose is burnt off in the stomach straight after the meal.</a:t>
+            </a:r>
+            <a:endParaRPr lang="en-US" sz="1300" dirty="0"/>
           </a:p>
         </p:txBody>
       </p:sp>
@@ -4653,7 +4653,7 @@
               <a:buNone/>
             </a:pPr>
             <a:r>
-              <a:rPr lang="en-US" sz="1700" dirty="0">
+              <a:rPr lang="en-US" sz="1300" dirty="0">
                 <a:solidFill>
                   <a:srgbClr val="FFFFFF"/>
                 </a:solidFill>
@@ -4661,9 +4661,9 @@
                 <a:ea typeface="Arial" pitchFamily="34" charset="-122"/>
                 <a:cs typeface="Arial" pitchFamily="34" charset="-120"/>
               </a:rPr>
-              <a:t>Starch, ugali, beans, oil, salt, water</a:t>
-            </a:r>
-            <a:endParaRPr lang="en-US" sz="1700" dirty="0"/>
+              <a:t>The graph shows that glucose falls, but we have not yet explained what causes it, so it is a question to investigate.</a:t>
+            </a:r>
+            <a:endParaRPr lang="en-US" sz="1300" dirty="0"/>
           </a:p>
         </p:txBody>
       </p:sp>
@@ -4753,7 +4753,7 @@
               <a:buNone/>
             </a:pPr>
             <a:r>
-              <a:rPr lang="en-US" sz="1700" dirty="0">
+              <a:rPr lang="en-US" sz="1300" dirty="0">
                 <a:solidFill>
                   <a:srgbClr val="FFFFFF"/>
                 </a:solidFill>
@@ -4761,9 +4761,9 @@
                 <a:ea typeface="Arial" pitchFamily="34" charset="-122"/>
                 <a:cs typeface="Arial" pitchFamily="34" charset="-120"/>
               </a:rPr>
-              <a:t>Carbohydrates, proteins, lipids, vitamins, fibre, air</a:t>
-            </a:r>
-            <a:endParaRPr lang="en-US" sz="1700" dirty="0"/>
+              <a:t>Glucose falls only because the person has stopped eating.</a:t>
+            </a:r>
+            <a:endParaRPr lang="en-US" sz="1300" dirty="0"/>
           </a:p>
         </p:txBody>
       </p:sp>
@@ -4853,7 +4853,7 @@
               <a:buNone/>
             </a:pPr>
             <a:r>
-              <a:rPr lang="en-US" sz="1700" dirty="0">
+              <a:rPr lang="en-US" sz="1300" dirty="0">
                 <a:solidFill>
                   <a:srgbClr val="FFFFFF"/>
                 </a:solidFill>
@@ -4861,9 +4861,9 @@
                 <a:ea typeface="Arial" pitchFamily="34" charset="-122"/>
                 <a:cs typeface="Arial" pitchFamily="34" charset="-120"/>
               </a:rPr>
-              <a:t>Carbohydrates, proteins, lipids, vitamins, mineral salts, water</a:t>
-            </a:r>
-            <a:endParaRPr lang="en-US" sz="1700" dirty="0"/>
+              <a:t>Glucose simply disappears from the blood with time and nothing is involved.</a:t>
+            </a:r>
+            <a:endParaRPr lang="en-US" sz="1300" dirty="0"/>
           </a:p>
         </p:txBody>
       </p:sp>
@@ -5032,7 +5032,7 @@
                 <a:ea typeface="Arial" pitchFamily="34" charset="-122"/>
                 <a:cs typeface="Arial" pitchFamily="34" charset="-120"/>
               </a:rPr>
-              <a:t>Use after: Explain phase</a:t>
+              <a:t>Use after: DQB phase</a:t>
             </a:r>
             <a:endParaRPr lang="en-US" sz="1100" dirty="0"/>
           </a:p>
@@ -5071,7 +5071,7 @@
                 <a:ea typeface="Arial" pitchFamily="34" charset="-122"/>
                 <a:cs typeface="Arial" pitchFamily="34" charset="-120"/>
               </a:rPr>
-              <a:t>After the card sort and gallery walk, some groups disagree about which chemical family a food is richest in, and nobody corrects them. How will the class find out which matches are correct?</a:t>
+              <a:t>Learners are writing questions for the Driving Question Board about the glucose graph. Which question is the most specific and can be investigated?</a:t>
             </a:r>
             <a:endParaRPr lang="en-US" sz="2000" dirty="0"/>
           </a:p>
@@ -5171,7 +5171,7 @@
                 <a:ea typeface="Arial" pitchFamily="34" charset="-122"/>
                 <a:cs typeface="Arial" pitchFamily="34" charset="-120"/>
               </a:rPr>
-              <a:t>By doing chemical tests on foods in the next lessons.</a:t>
+              <a:t>Is glucose good?</a:t>
             </a:r>
             <a:endParaRPr lang="en-US" sz="1700" dirty="0"/>
           </a:p>
@@ -5271,7 +5271,7 @@
                 <a:ea typeface="Arial" pitchFamily="34" charset="-122"/>
                 <a:cs typeface="Arial" pitchFamily="34" charset="-120"/>
               </a:rPr>
-              <a:t>By choosing the match that sounds most scientific.</a:t>
+              <a:t>What chemicals are in ugali?</a:t>
             </a:r>
             <a:endParaRPr lang="en-US" sz="1700" dirty="0"/>
           </a:p>
@@ -5371,7 +5371,7 @@
                 <a:ea typeface="Arial" pitchFamily="34" charset="-122"/>
                 <a:cs typeface="Arial" pitchFamily="34" charset="-120"/>
               </a:rPr>
-              <a:t>By asking the group with the neatest handwriting.</a:t>
+              <a:t>Did Wanjiru enjoy her lunch?</a:t>
             </a:r>
             <a:endParaRPr lang="en-US" sz="1700" dirty="0"/>
           </a:p>
@@ -5471,7 +5471,7 @@
                 <a:ea typeface="Arial" pitchFamily="34" charset="-122"/>
                 <a:cs typeface="Arial" pitchFamily="34" charset="-120"/>
               </a:rPr>
-              <a:t>By voting for the match that most groups chose.</a:t>
+              <a:t>Why is food?</a:t>
             </a:r>
             <a:endParaRPr lang="en-US" sz="1700" dirty="0"/>
           </a:p>
@@ -5681,7 +5681,7 @@
                 <a:ea typeface="Arial" pitchFamily="34" charset="-122"/>
                 <a:cs typeface="Arial" pitchFamily="34" charset="-120"/>
               </a:rPr>
-              <a:t>You have drawn your first model of what happens inside the body of each child, and written 'My model cannot yet explain ___ because ___'. Which statement about this first model is correct?</a:t>
+              <a:t>Learners draw an initial model of Wanjiru's meal and her glucose graph, using boxes and arrows with question marks where they are unsure. Which skeleton shows the correct order of the parts?</a:t>
             </a:r>
             <a:endParaRPr lang="en-US" sz="2000" dirty="0"/>
           </a:p>
@@ -5773,7 +5773,7 @@
               <a:buNone/>
             </a:pPr>
             <a:r>
-              <a:rPr lang="en-US" sz="1700" dirty="0">
+              <a:rPr lang="en-US" sz="1500" dirty="0">
                 <a:solidFill>
                   <a:srgbClr val="FFFFFF"/>
                 </a:solidFill>
@@ -5781,9 +5781,9 @@
                 <a:ea typeface="Arial" pitchFamily="34" charset="-122"/>
                 <a:cs typeface="Arial" pitchFamily="34" charset="-120"/>
               </a:rPr>
-              <a:t>It is your best current explanation and will be revised as you learn more.</a:t>
-            </a:r>
-            <a:endParaRPr lang="en-US" sz="1700" dirty="0"/>
+              <a:t>Back to normal → ? → Food chemicals → ? → Glucose in blood</a:t>
+            </a:r>
+            <a:endParaRPr lang="en-US" sz="1500" dirty="0"/>
           </a:p>
         </p:txBody>
       </p:sp>
@@ -5873,7 +5873,7 @@
               <a:buNone/>
             </a:pPr>
             <a:r>
-              <a:rPr lang="en-US" sz="1700" dirty="0">
+              <a:rPr lang="en-US" sz="1500" dirty="0">
                 <a:solidFill>
                   <a:srgbClr val="FFFFFF"/>
                 </a:solidFill>
@@ -5881,9 +5881,9 @@
                 <a:ea typeface="Arial" pitchFamily="34" charset="-122"/>
                 <a:cs typeface="Arial" pitchFamily="34" charset="-120"/>
               </a:rPr>
-              <a:t>It should be erased if it turns out to be wrong.</a:t>
-            </a:r>
-            <a:endParaRPr lang="en-US" sz="1700" dirty="0"/>
+              <a:t>Glucose in blood → ? → Food chemicals → ? → Back to normal</a:t>
+            </a:r>
+            <a:endParaRPr lang="en-US" sz="1500" dirty="0"/>
           </a:p>
         </p:txBody>
       </p:sp>
@@ -5973,7 +5973,7 @@
               <a:buNone/>
             </a:pPr>
             <a:r>
-              <a:rPr lang="en-US" sz="1700" dirty="0">
+              <a:rPr lang="en-US" sz="1500" dirty="0">
                 <a:solidFill>
                   <a:srgbClr val="FFFFFF"/>
                 </a:solidFill>
@@ -5981,9 +5981,9 @@
                 <a:ea typeface="Arial" pitchFamily="34" charset="-122"/>
                 <a:cs typeface="Arial" pitchFamily="34" charset="-120"/>
               </a:rPr>
-              <a:t>It must use all the correct chemical names before it is finished.</a:t>
-            </a:r>
-            <a:endParaRPr lang="en-US" sz="1700" dirty="0"/>
+              <a:t>Food chemicals → ? → Back to normal → ? → Glucose in blood</a:t>
+            </a:r>
+            <a:endParaRPr lang="en-US" sz="1500" dirty="0"/>
           </a:p>
         </p:txBody>
       </p:sp>
@@ -6073,7 +6073,7 @@
               <a:buNone/>
             </a:pPr>
             <a:r>
-              <a:rPr lang="en-US" sz="1700" dirty="0">
+              <a:rPr lang="en-US" sz="1500" dirty="0">
                 <a:solidFill>
                   <a:srgbClr val="FFFFFF"/>
                 </a:solidFill>
@@ -6081,9 +6081,9 @@
                 <a:ea typeface="Arial" pitchFamily="34" charset="-122"/>
                 <a:cs typeface="Arial" pitchFamily="34" charset="-120"/>
               </a:rPr>
-              <a:t>It is your final answer for the whole unit.</a:t>
-            </a:r>
-            <a:endParaRPr lang="en-US" sz="1700" dirty="0"/>
+              <a:t>Food chemicals → ? → Glucose in blood (rises to 8.0 mmol/L) → ? → Back to normal (4.5 mmol/L)</a:t>
+            </a:r>
+            <a:endParaRPr lang="en-US" sz="1500" dirty="0"/>
           </a:p>
         </p:txBody>
       </p:sp>
